--- a/CANLOG_1.pptx
+++ b/CANLOG_1.pptx
@@ -1318,7 +1318,7 @@
             <a:pPr indent="0" algn="r">
               <a:buNone/>
             </a:pPr>
-            <a:fld id="{3F8992BA-8E55-41B2-B44F-17176BCC3F15}" type="slidenum">
+            <a:fld id="{88F6EDFD-80A2-4D07-9D15-44024AADF00A}" type="slidenum">
               <a:rPr lang="en-US" sz="1400" b="0" u="none" strike="noStrike">
                 <a:solidFill>
                   <a:srgbClr val="000000"/>
@@ -2484,7 +2484,7 @@
             <a:pPr indent="0" algn="r">
               <a:buNone/>
             </a:pPr>
-            <a:fld id="{42B6DAFB-A000-4F5C-BC6A-8102A337B9C0}" type="slidenum">
+            <a:fld id="{7E512A71-45B5-4636-9150-25874A062FC5}" type="slidenum">
               <a:rPr lang="en-US" sz="1400" b="0" u="none" strike="noStrike">
                 <a:solidFill>
                   <a:srgbClr val="000000"/>
@@ -3650,7 +3650,7 @@
             <a:pPr indent="0" algn="r">
               <a:buNone/>
             </a:pPr>
-            <a:fld id="{1D432715-6906-4D75-8266-A1B44D3C1D4F}" type="slidenum">
+            <a:fld id="{F52FDEFA-3C67-4608-98DA-D17EDC1C5D20}" type="slidenum">
               <a:rPr lang="en-US" sz="1400" b="0" u="none" strike="noStrike">
                 <a:solidFill>
                   <a:srgbClr val="000000"/>
@@ -4816,7 +4816,7 @@
             <a:pPr indent="0" algn="r">
               <a:buNone/>
             </a:pPr>
-            <a:fld id="{978C8023-A2B5-400F-9FE8-6A05BC9775B0}" type="slidenum">
+            <a:fld id="{90171DD3-5709-4133-BC0A-608C9DAB3764}" type="slidenum">
               <a:rPr lang="en-US" sz="1400" b="0" u="none" strike="noStrike">
                 <a:solidFill>
                   <a:srgbClr val="000000"/>
@@ -5982,7 +5982,7 @@
             <a:pPr indent="0" algn="r">
               <a:buNone/>
             </a:pPr>
-            <a:fld id="{8E23431F-3640-43B9-A35A-361A787BB826}" type="slidenum">
+            <a:fld id="{34BC87D7-79BF-4D25-9A2B-395057A9FF88}" type="slidenum">
               <a:rPr lang="en-US" sz="1400" b="0" u="none" strike="noStrike">
                 <a:solidFill>
                   <a:srgbClr val="000000"/>
@@ -7212,7 +7212,7 @@
             <a:pPr indent="0" algn="r">
               <a:buNone/>
             </a:pPr>
-            <a:fld id="{005E0400-9235-4359-A575-D7416B16344C}" type="slidenum">
+            <a:fld id="{5D82CB71-6C98-4E67-BCF4-36F0EC84F176}" type="slidenum">
               <a:rPr lang="en-US" sz="1400" b="0" u="none" strike="noStrike">
                 <a:solidFill>
                   <a:srgbClr val="000000"/>
@@ -8378,7 +8378,7 @@
             <a:pPr indent="0" algn="r">
               <a:buNone/>
             </a:pPr>
-            <a:fld id="{5AB06464-9189-41FE-A90B-22F541A5AEDA}" type="slidenum">
+            <a:fld id="{05C6192F-2865-4372-97B6-1CBB35434256}" type="slidenum">
               <a:rPr lang="en-US" sz="1400" b="0" u="none" strike="noStrike">
                 <a:solidFill>
                   <a:srgbClr val="000000"/>
@@ -9544,7 +9544,7 @@
             <a:pPr indent="0" algn="r">
               <a:buNone/>
             </a:pPr>
-            <a:fld id="{505E6BB8-230B-4F1A-BC3D-05FD0535A98D}" type="slidenum">
+            <a:fld id="{5EC2B586-7FCC-41F0-84D6-1E87006946EC}" type="slidenum">
               <a:rPr lang="en-US" sz="1400" b="0" u="none" strike="noStrike">
                 <a:solidFill>
                   <a:srgbClr val="000000"/>
@@ -10710,7 +10710,7 @@
             <a:pPr indent="0" algn="r">
               <a:buNone/>
             </a:pPr>
-            <a:fld id="{549FE04D-D7AD-4943-88C4-35A44FC95789}" type="slidenum">
+            <a:fld id="{56F87DE0-89D4-4A86-902F-0B5266C85177}" type="slidenum">
               <a:rPr lang="en-US" sz="1400" b="0" u="none" strike="noStrike">
                 <a:solidFill>
                   <a:srgbClr val="000000"/>
@@ -11876,7 +11876,7 @@
             <a:pPr indent="0" algn="r">
               <a:buNone/>
             </a:pPr>
-            <a:fld id="{AA7EB332-FADD-4B54-9848-6B0BE62B417C}" type="slidenum">
+            <a:fld id="{3BB50CA3-96B7-449B-A3AC-75F15D409BB1}" type="slidenum">
               <a:rPr lang="en-US" sz="1400" b="0" u="none" strike="noStrike">
                 <a:solidFill>
                   <a:srgbClr val="000000"/>
@@ -13042,7 +13042,7 @@
             <a:pPr indent="0" algn="r">
               <a:buNone/>
             </a:pPr>
-            <a:fld id="{A09CABA8-4234-4E50-A964-5BC5746585BC}" type="slidenum">
+            <a:fld id="{064195A7-77E2-4BC2-9DD8-EAE914052D42}" type="slidenum">
               <a:rPr lang="en-US" sz="1400" b="0" u="none" strike="noStrike">
                 <a:solidFill>
                   <a:srgbClr val="000000"/>
@@ -14208,7 +14208,7 @@
             <a:pPr indent="0" algn="r">
               <a:buNone/>
             </a:pPr>
-            <a:fld id="{9AA92D01-5D69-4B7A-A0E4-955EE89723FD}" type="slidenum">
+            <a:fld id="{52441377-68C3-486B-A812-FF8A5C407C54}" type="slidenum">
               <a:rPr lang="en-US" sz="1400" b="0" u="none" strike="noStrike">
                 <a:solidFill>
                   <a:srgbClr val="000000"/>
@@ -15460,7 +15460,7 @@
       </p:grpSpPr>
       <p:sp>
         <p:nvSpPr>
-          <p:cNvPr id="197" name="PlaceHolder 1"/>
+          <p:cNvPr id="200" name="PlaceHolder 1"/>
           <p:cNvSpPr>
             <a:spLocks noGrp="1"/>
           </p:cNvSpPr>
@@ -15590,7 +15590,7 @@
       </p:sp>
       <p:sp>
         <p:nvSpPr>
-          <p:cNvPr id="198" name="PlaceHolder 2"/>
+          <p:cNvPr id="201" name="PlaceHolder 2"/>
           <p:cNvSpPr>
             <a:spLocks noGrp="1"/>
           </p:cNvSpPr>
@@ -15646,7 +15646,7 @@
       </p:sp>
       <p:sp>
         <p:nvSpPr>
-          <p:cNvPr id="199" name="PlaceHolder 3"/>
+          <p:cNvPr id="202" name="PlaceHolder 3"/>
           <p:cNvSpPr>
             <a:spLocks noGrp="1"/>
           </p:cNvSpPr>
@@ -16834,7 +16834,7 @@
       </p:sp>
       <p:pic>
         <p:nvPicPr>
-          <p:cNvPr id="200" name=""/>
+          <p:cNvPr id="203" name=""/>
           <p:cNvPicPr/>
           <p:nvPr/>
         </p:nvPicPr>
@@ -16858,7 +16858,7 @@
       </p:pic>
       <p:pic>
         <p:nvPicPr>
-          <p:cNvPr id="201" name=""/>
+          <p:cNvPr id="204" name=""/>
           <p:cNvPicPr/>
           <p:nvPr/>
         </p:nvPicPr>
@@ -16894,7 +16894,7 @@
         <p:txBody>
           <a:bodyPr/>
           <a:p>
-            <a:fld id="{F923EDE1-57CA-4C0D-A6FF-E93415086594}" type="slidenum">
+            <a:fld id="{C66E4050-3002-4720-80F3-D12E0D837003}" type="slidenum">
               <a:t>10</a:t>
             </a:fld>
           </a:p>
@@ -16932,7 +16932,7 @@
       </p:grpSpPr>
       <p:sp>
         <p:nvSpPr>
-          <p:cNvPr id="202" name="PlaceHolder 1"/>
+          <p:cNvPr id="205" name="PlaceHolder 1"/>
           <p:cNvSpPr>
             <a:spLocks noGrp="1"/>
           </p:cNvSpPr>
@@ -17062,7 +17062,7 @@
       </p:sp>
       <p:sp>
         <p:nvSpPr>
-          <p:cNvPr id="203" name="PlaceHolder 2"/>
+          <p:cNvPr id="206" name="PlaceHolder 2"/>
           <p:cNvSpPr>
             <a:spLocks noGrp="1"/>
           </p:cNvSpPr>
@@ -17118,7 +17118,7 @@
       </p:sp>
       <p:sp>
         <p:nvSpPr>
-          <p:cNvPr id="204" name="PlaceHolder 3"/>
+          <p:cNvPr id="207" name="PlaceHolder 3"/>
           <p:cNvSpPr>
             <a:spLocks noGrp="1"/>
           </p:cNvSpPr>
@@ -17895,7 +17895,7 @@
       </p:sp>
       <p:pic>
         <p:nvPicPr>
-          <p:cNvPr id="205" name=""/>
+          <p:cNvPr id="208" name=""/>
           <p:cNvPicPr/>
           <p:nvPr/>
         </p:nvPicPr>
@@ -17919,7 +17919,7 @@
       </p:pic>
       <p:pic>
         <p:nvPicPr>
-          <p:cNvPr id="206" name=""/>
+          <p:cNvPr id="209" name=""/>
           <p:cNvPicPr/>
           <p:nvPr/>
         </p:nvPicPr>
@@ -17955,7 +17955,7 @@
         <p:txBody>
           <a:bodyPr/>
           <a:p>
-            <a:fld id="{0775145A-B432-494B-B6A2-3677B77016C5}" type="slidenum">
+            <a:fld id="{A0EA2A5D-F4EE-4D9C-9CFF-08B4FC815220}" type="slidenum">
               <a:t>11</a:t>
             </a:fld>
           </a:p>
@@ -17993,7 +17993,7 @@
       </p:grpSpPr>
       <p:sp>
         <p:nvSpPr>
-          <p:cNvPr id="207" name="PlaceHolder 1"/>
+          <p:cNvPr id="210" name="PlaceHolder 1"/>
           <p:cNvSpPr>
             <a:spLocks noGrp="1"/>
           </p:cNvSpPr>
@@ -18123,7 +18123,7 @@
       </p:sp>
       <p:sp>
         <p:nvSpPr>
-          <p:cNvPr id="208" name="PlaceHolder 2"/>
+          <p:cNvPr id="211" name="PlaceHolder 2"/>
           <p:cNvSpPr>
             <a:spLocks noGrp="1"/>
           </p:cNvSpPr>
@@ -18179,7 +18179,7 @@
       </p:sp>
       <p:sp>
         <p:nvSpPr>
-          <p:cNvPr id="209" name="PlaceHolder 3"/>
+          <p:cNvPr id="212" name="PlaceHolder 3"/>
           <p:cNvSpPr>
             <a:spLocks noGrp="1"/>
           </p:cNvSpPr>
@@ -18999,7 +18999,7 @@
       </p:sp>
       <p:pic>
         <p:nvPicPr>
-          <p:cNvPr id="210" name=""/>
+          <p:cNvPr id="213" name=""/>
           <p:cNvPicPr/>
           <p:nvPr/>
         </p:nvPicPr>
@@ -19023,7 +19023,7 @@
       </p:pic>
       <p:pic>
         <p:nvPicPr>
-          <p:cNvPr id="211" name=""/>
+          <p:cNvPr id="214" name=""/>
           <p:cNvPicPr/>
           <p:nvPr/>
         </p:nvPicPr>
@@ -19059,7 +19059,7 @@
         <p:txBody>
           <a:bodyPr/>
           <a:p>
-            <a:fld id="{795DA5EF-CE46-40D7-BE6B-48465D99F900}" type="slidenum">
+            <a:fld id="{FDBAE1EE-27FD-4FAD-BDA7-E99D1D3C8174}" type="slidenum">
               <a:t>12</a:t>
             </a:fld>
           </a:p>
@@ -19097,7 +19097,7 @@
       </p:grpSpPr>
       <p:sp>
         <p:nvSpPr>
-          <p:cNvPr id="212" name="PlaceHolder 1"/>
+          <p:cNvPr id="215" name="PlaceHolder 1"/>
           <p:cNvSpPr>
             <a:spLocks noGrp="1"/>
           </p:cNvSpPr>
@@ -19227,7 +19227,7 @@
       </p:sp>
       <p:sp>
         <p:nvSpPr>
-          <p:cNvPr id="213" name="PlaceHolder 2"/>
+          <p:cNvPr id="216" name="PlaceHolder 2"/>
           <p:cNvSpPr>
             <a:spLocks noGrp="1"/>
           </p:cNvSpPr>
@@ -19283,7 +19283,7 @@
       </p:sp>
       <p:sp>
         <p:nvSpPr>
-          <p:cNvPr id="214" name="PlaceHolder 3"/>
+          <p:cNvPr id="217" name="PlaceHolder 3"/>
           <p:cNvSpPr>
             <a:spLocks noGrp="1"/>
           </p:cNvSpPr>
@@ -19646,7 +19646,7 @@
       </p:sp>
       <p:pic>
         <p:nvPicPr>
-          <p:cNvPr id="215" name=""/>
+          <p:cNvPr id="218" name=""/>
           <p:cNvPicPr/>
           <p:nvPr/>
         </p:nvPicPr>
@@ -19670,7 +19670,7 @@
       </p:pic>
       <p:pic>
         <p:nvPicPr>
-          <p:cNvPr id="216" name=""/>
+          <p:cNvPr id="219" name=""/>
           <p:cNvPicPr/>
           <p:nvPr/>
         </p:nvPicPr>
@@ -19706,7 +19706,7 @@
         <p:txBody>
           <a:bodyPr/>
           <a:p>
-            <a:fld id="{7CAE8644-97CC-414C-B2BE-4DA6043AC562}" type="slidenum">
+            <a:fld id="{6FA5C21F-4ECE-4CE7-8731-05A34191F6A1}" type="slidenum">
               <a:t>13</a:t>
             </a:fld>
           </a:p>
@@ -19873,62 +19873,6 @@
         </p:nvSpPr>
         <p:spPr>
           <a:xfrm>
-            <a:off x="540000" y="3060000"/>
-            <a:ext cx="2700000" cy="1800000"/>
-          </a:xfrm>
-          <a:prstGeom prst="rect">
-            <a:avLst/>
-          </a:prstGeom>
-          <a:noFill/>
-          <a:ln w="0">
-            <a:noFill/>
-          </a:ln>
-        </p:spPr>
-        <p:txBody>
-          <a:bodyPr lIns="0" tIns="0" rIns="0" bIns="0" anchor="t">
-            <a:normAutofit/>
-          </a:bodyPr>
-          <a:p>
-            <a:pPr marL="432000" indent="0" algn="l">
-              <a:spcBef>
-                <a:spcPts val="1057"/>
-              </a:spcBef>
-              <a:buNone/>
-            </a:pPr>
-            <a:r>
-              <a:rPr lang="en-US" sz="2400" b="0" u="none" strike="noStrike">
-                <a:solidFill>
-                  <a:srgbClr val="000000"/>
-                </a:solidFill>
-                <a:effectLst/>
-                <a:uFillTx/>
-                <a:latin typeface="Arial"/>
-              </a:rPr>
-              <a:t> </a:t>
-            </a:r>
-            <a:endParaRPr lang="en-US" sz="2400" b="0" u="none" strike="noStrike">
-              <a:solidFill>
-                <a:srgbClr val="000000"/>
-              </a:solidFill>
-              <a:effectLst/>
-              <a:uFillTx/>
-              <a:latin typeface="Arial"/>
-            </a:endParaRPr>
-          </a:p>
-        </p:txBody>
-      </p:sp>
-      <p:sp>
-        <p:nvSpPr>
-          <p:cNvPr id="162" name="PlaceHolder 3"/>
-          <p:cNvSpPr>
-            <a:spLocks noGrp="1"/>
-          </p:cNvSpPr>
-          <p:nvPr>
-            <p:ph/>
-          </p:nvPr>
-        </p:nvSpPr>
-        <p:spPr>
-          <a:xfrm>
             <a:off x="3420000" y="900000"/>
             <a:ext cx="6480000" cy="4320000"/>
           </a:xfrm>
@@ -20304,11 +20248,50 @@
               <a:latin typeface="D2Coding"/>
             </a:endParaRPr>
           </a:p>
+          <a:p>
+            <a:pPr marL="36000" indent="0" algn="l">
+              <a:spcBef>
+                <a:spcPts val="1057"/>
+              </a:spcBef>
+            </a:pPr>
+            <a:r>
+              <a:rPr lang="en-US" sz="900" b="0" u="none" strike="noStrike">
+                <a:solidFill>
+                  <a:srgbClr val="000000"/>
+                </a:solidFill>
+                <a:effectLst/>
+                <a:uFillTx/>
+                <a:latin typeface="D2Coding"/>
+                <a:ea typeface="D2Coding"/>
+              </a:rPr>
+              <a:t>   ...Data </a:t>
+            </a:r>
+            <a:r>
+              <a:rPr lang="ko-KR" sz="900" b="0" u="none" strike="noStrike">
+                <a:solidFill>
+                  <a:srgbClr val="000000"/>
+                </a:solidFill>
+                <a:effectLst/>
+                <a:uFillTx/>
+                <a:latin typeface="D2Coding"/>
+                <a:ea typeface="D2Coding"/>
+              </a:rPr>
+              <a:t>전송</a:t>
+            </a:r>
+            <a:endParaRPr lang="en-US" sz="900" b="0" u="none" strike="noStrike">
+              <a:solidFill>
+                <a:srgbClr val="000000"/>
+              </a:solidFill>
+              <a:effectLst/>
+              <a:uFillTx/>
+              <a:latin typeface="D2Coding"/>
+            </a:endParaRPr>
+          </a:p>
         </p:txBody>
       </p:sp>
       <p:pic>
         <p:nvPicPr>
-          <p:cNvPr id="163" name=""/>
+          <p:cNvPr id="162" name=""/>
           <p:cNvPicPr/>
           <p:nvPr/>
         </p:nvPicPr>
@@ -20332,7 +20315,194 @@
       </p:pic>
       <p:sp>
         <p:nvSpPr>
-          <p:cNvPr id="5" name="PlaceHolder 4"/>
+          <p:cNvPr id="163" name=""/>
+          <p:cNvSpPr txBox="1"/>
+          <p:nvPr/>
+        </p:nvSpPr>
+        <p:spPr>
+          <a:xfrm>
+            <a:off x="360000" y="3060000"/>
+            <a:ext cx="2880000" cy="2160000"/>
+          </a:xfrm>
+          <a:prstGeom prst="rect">
+            <a:avLst/>
+          </a:prstGeom>
+          <a:noFill/>
+          <a:ln w="0">
+            <a:noFill/>
+          </a:ln>
+        </p:spPr>
+        <p:txBody>
+          <a:bodyPr lIns="0" tIns="0" rIns="0" bIns="0" anchor="t">
+            <a:normAutofit/>
+          </a:bodyPr>
+          <a:p>
+            <a:pPr marL="36000">
+              <a:spcBef>
+                <a:spcPts val="1057"/>
+              </a:spcBef>
+              <a:buClr>
+                <a:srgbClr val="FF8000"/>
+              </a:buClr>
+              <a:buSzPct val="45000"/>
+              <a:buFont typeface="Wingdings" charset="2"/>
+              <a:buChar char=""/>
+            </a:pPr>
+            <a:r>
+              <a:rPr lang="en-US" sz="1000" b="0" u="none" strike="noStrike">
+                <a:solidFill>
+                  <a:srgbClr val="000000"/>
+                </a:solidFill>
+                <a:effectLst/>
+                <a:uFillTx/>
+                <a:latin typeface="Arial"/>
+              </a:rPr>
+              <a:t> </a:t>
+            </a:r>
+            <a:endParaRPr lang="en-US" sz="1000" b="0" u="none" strike="noStrike">
+              <a:solidFill>
+                <a:srgbClr val="000000"/>
+              </a:solidFill>
+              <a:effectLst/>
+              <a:uFillTx/>
+              <a:latin typeface="Arial"/>
+            </a:endParaRPr>
+          </a:p>
+          <a:p>
+            <a:pPr marL="36000">
+              <a:spcBef>
+                <a:spcPts val="1057"/>
+              </a:spcBef>
+            </a:pPr>
+            <a:r>
+              <a:rPr lang="en-US" sz="1000" b="0" u="none" strike="noStrike">
+                <a:solidFill>
+                  <a:srgbClr val="000000"/>
+                </a:solidFill>
+                <a:effectLst/>
+                <a:uFillTx/>
+                <a:latin typeface="Arial"/>
+              </a:rPr>
+              <a:t>1. Secure Access (29h) - CCU </a:t>
+            </a:r>
+            <a:endParaRPr lang="en-US" sz="1000" b="0" u="none" strike="noStrike">
+              <a:solidFill>
+                <a:srgbClr val="000000"/>
+              </a:solidFill>
+              <a:effectLst/>
+              <a:uFillTx/>
+              <a:latin typeface="Arial"/>
+            </a:endParaRPr>
+          </a:p>
+          <a:p>
+            <a:pPr marL="36000">
+              <a:spcBef>
+                <a:spcPts val="1057"/>
+              </a:spcBef>
+            </a:pPr>
+            <a:r>
+              <a:rPr lang="en-US" sz="1000" b="0" u="none" strike="noStrike">
+                <a:solidFill>
+                  <a:srgbClr val="000000"/>
+                </a:solidFill>
+                <a:effectLst/>
+                <a:uFillTx/>
+                <a:latin typeface="Arial"/>
+              </a:rPr>
+              <a:t>2. Request Download (34h)</a:t>
+            </a:r>
+            <a:endParaRPr lang="en-US" sz="1000" b="0" u="none" strike="noStrike">
+              <a:solidFill>
+                <a:srgbClr val="000000"/>
+              </a:solidFill>
+              <a:effectLst/>
+              <a:uFillTx/>
+              <a:latin typeface="Arial"/>
+            </a:endParaRPr>
+          </a:p>
+          <a:p>
+            <a:pPr marL="36000">
+              <a:spcBef>
+                <a:spcPts val="1057"/>
+              </a:spcBef>
+            </a:pPr>
+            <a:r>
+              <a:rPr lang="en-US" sz="1000" b="0" u="none" strike="noStrike">
+                <a:solidFill>
+                  <a:srgbClr val="000000"/>
+                </a:solidFill>
+                <a:effectLst/>
+                <a:uFillTx/>
+                <a:latin typeface="Arial"/>
+              </a:rPr>
+              <a:t> </a:t>
+            </a:r>
+            <a:endParaRPr lang="en-US" sz="1000" b="0" u="none" strike="noStrike">
+              <a:solidFill>
+                <a:srgbClr val="000000"/>
+              </a:solidFill>
+              <a:effectLst/>
+              <a:uFillTx/>
+              <a:latin typeface="Arial"/>
+            </a:endParaRPr>
+          </a:p>
+          <a:p>
+            <a:pPr marL="36000">
+              <a:spcBef>
+                <a:spcPts val="1057"/>
+              </a:spcBef>
+            </a:pPr>
+            <a:r>
+              <a:rPr lang="en-US" sz="1000" b="0" u="none" strike="noStrike">
+                <a:solidFill>
+                  <a:srgbClr val="000000"/>
+                </a:solidFill>
+                <a:effectLst/>
+                <a:uFillTx/>
+                <a:latin typeface="Arial"/>
+              </a:rPr>
+              <a:t> </a:t>
+            </a:r>
+            <a:endParaRPr lang="en-US" sz="1000" b="0" u="none" strike="noStrike">
+              <a:solidFill>
+                <a:srgbClr val="000000"/>
+              </a:solidFill>
+              <a:effectLst/>
+              <a:uFillTx/>
+              <a:latin typeface="Arial"/>
+            </a:endParaRPr>
+          </a:p>
+          <a:p>
+            <a:pPr marL="36000">
+              <a:spcBef>
+                <a:spcPts val="1057"/>
+              </a:spcBef>
+            </a:pPr>
+            <a:r>
+              <a:rPr lang="en-US" sz="1000" b="0" u="none" strike="noStrike">
+                <a:solidFill>
+                  <a:srgbClr val="000000"/>
+                </a:solidFill>
+                <a:effectLst/>
+                <a:uFillTx/>
+                <a:latin typeface="Arial"/>
+              </a:rPr>
+              <a:t> </a:t>
+            </a:r>
+            <a:endParaRPr lang="en-US" sz="1000" b="0" u="none" strike="noStrike">
+              <a:solidFill>
+                <a:srgbClr val="000000"/>
+              </a:solidFill>
+              <a:effectLst/>
+              <a:uFillTx/>
+              <a:latin typeface="Arial"/>
+            </a:endParaRPr>
+          </a:p>
+        </p:txBody>
+      </p:sp>
+      <p:sp>
+        <p:nvSpPr>
+          <p:cNvPr id="4" name="PlaceHolder 3"/>
           <p:cNvSpPr>
             <a:spLocks noGrp="1"/>
           </p:cNvSpPr>
@@ -20344,7 +20514,7 @@
         <p:txBody>
           <a:bodyPr/>
           <a:p>
-            <a:fld id="{EF475856-99BC-45A0-8C04-A7A1A143E4DB}" type="slidenum">
+            <a:fld id="{0B990DF1-FD34-488A-892A-6CB381C960D4}" type="slidenum">
               <a:t>2</a:t>
             </a:fld>
           </a:p>
@@ -20442,7 +20612,7 @@
                 <a:uFillTx/>
                 <a:latin typeface="Arial"/>
               </a:rPr>
-              <a:t>7B0(Target) </a:t>
+              <a:t>ECU </a:t>
             </a:r>
             <a:r>
               <a:rPr lang="ko-KR" sz="1800" b="0" u="none" strike="noStrike">
@@ -20502,62 +20672,6 @@
       <p:sp>
         <p:nvSpPr>
           <p:cNvPr id="165" name="PlaceHolder 2"/>
-          <p:cNvSpPr>
-            <a:spLocks noGrp="1"/>
-          </p:cNvSpPr>
-          <p:nvPr>
-            <p:ph/>
-          </p:nvPr>
-        </p:nvSpPr>
-        <p:spPr>
-          <a:xfrm>
-            <a:off x="540000" y="3060000"/>
-            <a:ext cx="2700000" cy="1800000"/>
-          </a:xfrm>
-          <a:prstGeom prst="rect">
-            <a:avLst/>
-          </a:prstGeom>
-          <a:noFill/>
-          <a:ln w="0">
-            <a:noFill/>
-          </a:ln>
-        </p:spPr>
-        <p:txBody>
-          <a:bodyPr lIns="0" tIns="0" rIns="0" bIns="0" anchor="t">
-            <a:normAutofit/>
-          </a:bodyPr>
-          <a:p>
-            <a:pPr marL="432000" indent="0" algn="l">
-              <a:spcBef>
-                <a:spcPts val="1057"/>
-              </a:spcBef>
-              <a:buNone/>
-            </a:pPr>
-            <a:r>
-              <a:rPr lang="en-US" sz="2400" b="0" u="none" strike="noStrike">
-                <a:solidFill>
-                  <a:srgbClr val="000000"/>
-                </a:solidFill>
-                <a:effectLst/>
-                <a:uFillTx/>
-                <a:latin typeface="Arial"/>
-              </a:rPr>
-              <a:t> </a:t>
-            </a:r>
-            <a:endParaRPr lang="en-US" sz="2400" b="0" u="none" strike="noStrike">
-              <a:solidFill>
-                <a:srgbClr val="000000"/>
-              </a:solidFill>
-              <a:effectLst/>
-              <a:uFillTx/>
-              <a:latin typeface="Arial"/>
-            </a:endParaRPr>
-          </a:p>
-        </p:txBody>
-      </p:sp>
-      <p:sp>
-        <p:nvSpPr>
-          <p:cNvPr id="166" name="PlaceHolder 3"/>
           <p:cNvSpPr>
             <a:spLocks noGrp="1"/>
           </p:cNvSpPr>
@@ -20599,6 +20713,45 @@
                 <a:latin typeface="D2Coding"/>
                 <a:ea typeface="D2Coding"/>
               </a:rPr>
+              <a:t>   ...</a:t>
+            </a:r>
+            <a:r>
+              <a:rPr lang="ko-KR" sz="900" b="0" u="none" strike="noStrike">
+                <a:solidFill>
+                  <a:srgbClr val="000000"/>
+                </a:solidFill>
+                <a:effectLst/>
+                <a:uFillTx/>
+                <a:latin typeface="D2Coding"/>
+                <a:ea typeface="D2Coding"/>
+              </a:rPr>
+              <a:t>데이터 전송 계속</a:t>
+            </a:r>
+            <a:endParaRPr lang="en-US" sz="900" b="0" u="none" strike="noStrike">
+              <a:solidFill>
+                <a:srgbClr val="000000"/>
+              </a:solidFill>
+              <a:effectLst/>
+              <a:uFillTx/>
+              <a:latin typeface="D2Coding"/>
+            </a:endParaRPr>
+          </a:p>
+          <a:p>
+            <a:pPr marL="36000" indent="0" algn="l">
+              <a:spcBef>
+                <a:spcPts val="1057"/>
+              </a:spcBef>
+            </a:pPr>
+            <a:r>
+              <a:rPr lang="en-US" sz="900" b="0" u="none" strike="noStrike">
+                <a:solidFill>
+                  <a:srgbClr val="000000"/>
+                </a:solidFill>
+                <a:effectLst/>
+                <a:uFillTx/>
+                <a:latin typeface="D2Coding"/>
+                <a:ea typeface="D2Coding"/>
+              </a:rPr>
               <a:t>000005D0  8  2E  A1  00  00  55  55  55  55   85.665110 R  - Memo</a:t>
             </a:r>
             <a:endParaRPr lang="en-US" sz="900" b="0" u="none" strike="noStrike">
@@ -21200,7 +21353,7 @@
       </p:sp>
       <p:pic>
         <p:nvPicPr>
-          <p:cNvPr id="167" name=""/>
+          <p:cNvPr id="166" name=""/>
           <p:cNvPicPr/>
           <p:nvPr/>
         </p:nvPicPr>
@@ -21224,7 +21377,194 @@
       </p:pic>
       <p:sp>
         <p:nvSpPr>
-          <p:cNvPr id="5" name="PlaceHolder 4"/>
+          <p:cNvPr id="167" name=""/>
+          <p:cNvSpPr txBox="1"/>
+          <p:nvPr/>
+        </p:nvSpPr>
+        <p:spPr>
+          <a:xfrm>
+            <a:off x="360000" y="3060000"/>
+            <a:ext cx="2880000" cy="2160000"/>
+          </a:xfrm>
+          <a:prstGeom prst="rect">
+            <a:avLst/>
+          </a:prstGeom>
+          <a:noFill/>
+          <a:ln w="0">
+            <a:noFill/>
+          </a:ln>
+        </p:spPr>
+        <p:txBody>
+          <a:bodyPr lIns="0" tIns="0" rIns="0" bIns="0" anchor="t">
+            <a:normAutofit/>
+          </a:bodyPr>
+          <a:p>
+            <a:pPr marL="36000">
+              <a:spcBef>
+                <a:spcPts val="1057"/>
+              </a:spcBef>
+              <a:buClr>
+                <a:srgbClr val="FF8000"/>
+              </a:buClr>
+              <a:buSzPct val="45000"/>
+              <a:buFont typeface="Wingdings" charset="2"/>
+              <a:buChar char=""/>
+            </a:pPr>
+            <a:r>
+              <a:rPr lang="en-US" sz="1000" b="0" u="none" strike="noStrike">
+                <a:solidFill>
+                  <a:srgbClr val="000000"/>
+                </a:solidFill>
+                <a:effectLst/>
+                <a:uFillTx/>
+                <a:latin typeface="Arial"/>
+              </a:rPr>
+              <a:t> </a:t>
+            </a:r>
+            <a:endParaRPr lang="en-US" sz="1000" b="0" u="none" strike="noStrike">
+              <a:solidFill>
+                <a:srgbClr val="000000"/>
+              </a:solidFill>
+              <a:effectLst/>
+              <a:uFillTx/>
+              <a:latin typeface="Arial"/>
+            </a:endParaRPr>
+          </a:p>
+          <a:p>
+            <a:pPr marL="36000">
+              <a:spcBef>
+                <a:spcPts val="1057"/>
+              </a:spcBef>
+            </a:pPr>
+            <a:r>
+              <a:rPr lang="en-US" sz="1000" b="0" u="none" strike="noStrike">
+                <a:solidFill>
+                  <a:srgbClr val="000000"/>
+                </a:solidFill>
+                <a:effectLst/>
+                <a:uFillTx/>
+                <a:latin typeface="Arial"/>
+              </a:rPr>
+              <a:t>1. Routine Control (31h)</a:t>
+            </a:r>
+            <a:endParaRPr lang="en-US" sz="1000" b="0" u="none" strike="noStrike">
+              <a:solidFill>
+                <a:srgbClr val="000000"/>
+              </a:solidFill>
+              <a:effectLst/>
+              <a:uFillTx/>
+              <a:latin typeface="Arial"/>
+            </a:endParaRPr>
+          </a:p>
+          <a:p>
+            <a:pPr marL="36000">
+              <a:spcBef>
+                <a:spcPts val="1057"/>
+              </a:spcBef>
+            </a:pPr>
+            <a:r>
+              <a:rPr lang="en-US" sz="1000" b="0" u="none" strike="noStrike">
+                <a:solidFill>
+                  <a:srgbClr val="000000"/>
+                </a:solidFill>
+                <a:effectLst/>
+                <a:uFillTx/>
+                <a:latin typeface="Arial"/>
+              </a:rPr>
+              <a:t>2. Request Download (34h)</a:t>
+            </a:r>
+            <a:endParaRPr lang="en-US" sz="1000" b="0" u="none" strike="noStrike">
+              <a:solidFill>
+                <a:srgbClr val="000000"/>
+              </a:solidFill>
+              <a:effectLst/>
+              <a:uFillTx/>
+              <a:latin typeface="Arial"/>
+            </a:endParaRPr>
+          </a:p>
+          <a:p>
+            <a:pPr marL="36000">
+              <a:spcBef>
+                <a:spcPts val="1057"/>
+              </a:spcBef>
+            </a:pPr>
+            <a:r>
+              <a:rPr lang="en-US" sz="1000" b="0" u="none" strike="noStrike">
+                <a:solidFill>
+                  <a:srgbClr val="000000"/>
+                </a:solidFill>
+                <a:effectLst/>
+                <a:uFillTx/>
+                <a:latin typeface="Arial"/>
+              </a:rPr>
+              <a:t> </a:t>
+            </a:r>
+            <a:endParaRPr lang="en-US" sz="1000" b="0" u="none" strike="noStrike">
+              <a:solidFill>
+                <a:srgbClr val="000000"/>
+              </a:solidFill>
+              <a:effectLst/>
+              <a:uFillTx/>
+              <a:latin typeface="Arial"/>
+            </a:endParaRPr>
+          </a:p>
+          <a:p>
+            <a:pPr marL="36000">
+              <a:spcBef>
+                <a:spcPts val="1057"/>
+              </a:spcBef>
+            </a:pPr>
+            <a:r>
+              <a:rPr lang="en-US" sz="1000" b="0" u="none" strike="noStrike">
+                <a:solidFill>
+                  <a:srgbClr val="000000"/>
+                </a:solidFill>
+                <a:effectLst/>
+                <a:uFillTx/>
+                <a:latin typeface="Arial"/>
+              </a:rPr>
+              <a:t> </a:t>
+            </a:r>
+            <a:endParaRPr lang="en-US" sz="1000" b="0" u="none" strike="noStrike">
+              <a:solidFill>
+                <a:srgbClr val="000000"/>
+              </a:solidFill>
+              <a:effectLst/>
+              <a:uFillTx/>
+              <a:latin typeface="Arial"/>
+            </a:endParaRPr>
+          </a:p>
+          <a:p>
+            <a:pPr marL="36000">
+              <a:spcBef>
+                <a:spcPts val="1057"/>
+              </a:spcBef>
+            </a:pPr>
+            <a:r>
+              <a:rPr lang="en-US" sz="1000" b="0" u="none" strike="noStrike">
+                <a:solidFill>
+                  <a:srgbClr val="000000"/>
+                </a:solidFill>
+                <a:effectLst/>
+                <a:uFillTx/>
+                <a:latin typeface="Arial"/>
+              </a:rPr>
+              <a:t> </a:t>
+            </a:r>
+            <a:endParaRPr lang="en-US" sz="1000" b="0" u="none" strike="noStrike">
+              <a:solidFill>
+                <a:srgbClr val="000000"/>
+              </a:solidFill>
+              <a:effectLst/>
+              <a:uFillTx/>
+              <a:latin typeface="Arial"/>
+            </a:endParaRPr>
+          </a:p>
+        </p:txBody>
+      </p:sp>
+      <p:sp>
+        <p:nvSpPr>
+          <p:cNvPr id="4" name="PlaceHolder 3"/>
           <p:cNvSpPr>
             <a:spLocks noGrp="1"/>
           </p:cNvSpPr>
@@ -21236,7 +21576,7 @@
         <p:txBody>
           <a:bodyPr/>
           <a:p>
-            <a:fld id="{91A2CB52-DE1E-48CC-8A07-C4B3D40321E0}" type="slidenum">
+            <a:fld id="{D61286FC-94BB-4D98-98B7-DF329C43FD68}" type="slidenum">
               <a:t>3</a:t>
             </a:fld>
           </a:p>
@@ -21436,62 +21776,6 @@
         </p:nvSpPr>
         <p:spPr>
           <a:xfrm>
-            <a:off x="540000" y="3060000"/>
-            <a:ext cx="2700000" cy="1800000"/>
-          </a:xfrm>
-          <a:prstGeom prst="rect">
-            <a:avLst/>
-          </a:prstGeom>
-          <a:noFill/>
-          <a:ln w="0">
-            <a:noFill/>
-          </a:ln>
-        </p:spPr>
-        <p:txBody>
-          <a:bodyPr lIns="0" tIns="0" rIns="0" bIns="0" anchor="t">
-            <a:normAutofit/>
-          </a:bodyPr>
-          <a:p>
-            <a:pPr marL="432000" indent="0" algn="l">
-              <a:spcBef>
-                <a:spcPts val="1057"/>
-              </a:spcBef>
-              <a:buNone/>
-            </a:pPr>
-            <a:r>
-              <a:rPr lang="en-US" sz="2400" b="0" u="none" strike="noStrike">
-                <a:solidFill>
-                  <a:srgbClr val="000000"/>
-                </a:solidFill>
-                <a:effectLst/>
-                <a:uFillTx/>
-                <a:latin typeface="Arial"/>
-              </a:rPr>
-              <a:t> </a:t>
-            </a:r>
-            <a:endParaRPr lang="en-US" sz="2400" b="0" u="none" strike="noStrike">
-              <a:solidFill>
-                <a:srgbClr val="000000"/>
-              </a:solidFill>
-              <a:effectLst/>
-              <a:uFillTx/>
-              <a:latin typeface="Arial"/>
-            </a:endParaRPr>
-          </a:p>
-        </p:txBody>
-      </p:sp>
-      <p:sp>
-        <p:nvSpPr>
-          <p:cNvPr id="170" name="PlaceHolder 3"/>
-          <p:cNvSpPr>
-            <a:spLocks noGrp="1"/>
-          </p:cNvSpPr>
-          <p:nvPr>
-            <p:ph/>
-          </p:nvPr>
-        </p:nvSpPr>
-        <p:spPr>
-          <a:xfrm>
             <a:off x="3420000" y="894240"/>
             <a:ext cx="6480000" cy="4320000"/>
           </a:xfrm>
@@ -22553,7 +22837,7 @@
       </p:sp>
       <p:pic>
         <p:nvPicPr>
-          <p:cNvPr id="171" name=""/>
+          <p:cNvPr id="170" name=""/>
           <p:cNvPicPr/>
           <p:nvPr/>
         </p:nvPicPr>
@@ -22577,7 +22861,256 @@
       </p:pic>
       <p:sp>
         <p:nvSpPr>
-          <p:cNvPr id="5" name="PlaceHolder 4"/>
+          <p:cNvPr id="171" name=""/>
+          <p:cNvSpPr txBox="1"/>
+          <p:nvPr/>
+        </p:nvSpPr>
+        <p:spPr>
+          <a:xfrm>
+            <a:off x="360000" y="3060000"/>
+            <a:ext cx="2880000" cy="2160000"/>
+          </a:xfrm>
+          <a:prstGeom prst="rect">
+            <a:avLst/>
+          </a:prstGeom>
+          <a:noFill/>
+          <a:ln w="0">
+            <a:noFill/>
+          </a:ln>
+        </p:spPr>
+        <p:txBody>
+          <a:bodyPr lIns="0" tIns="0" rIns="0" bIns="0" anchor="t">
+            <a:normAutofit/>
+          </a:bodyPr>
+          <a:p>
+            <a:pPr marL="36000">
+              <a:spcBef>
+                <a:spcPts val="1057"/>
+              </a:spcBef>
+              <a:buClr>
+                <a:srgbClr val="FF8000"/>
+              </a:buClr>
+              <a:buSzPct val="45000"/>
+              <a:buFont typeface="Wingdings" charset="2"/>
+              <a:buChar char=""/>
+            </a:pPr>
+            <a:r>
+              <a:rPr lang="en-US" sz="1000" b="0" u="none" strike="noStrike">
+                <a:solidFill>
+                  <a:srgbClr val="000000"/>
+                </a:solidFill>
+                <a:effectLst/>
+                <a:uFillTx/>
+                <a:latin typeface="Arial"/>
+              </a:rPr>
+              <a:t> </a:t>
+            </a:r>
+            <a:endParaRPr lang="en-US" sz="1000" b="0" u="none" strike="noStrike">
+              <a:solidFill>
+                <a:srgbClr val="000000"/>
+              </a:solidFill>
+              <a:effectLst/>
+              <a:uFillTx/>
+              <a:latin typeface="Arial"/>
+            </a:endParaRPr>
+          </a:p>
+          <a:p>
+            <a:pPr marL="36000">
+              <a:spcBef>
+                <a:spcPts val="1057"/>
+              </a:spcBef>
+            </a:pPr>
+            <a:r>
+              <a:rPr lang="en-US" sz="1000" b="0" u="none" strike="noStrike">
+                <a:solidFill>
+                  <a:srgbClr val="000000"/>
+                </a:solidFill>
+                <a:effectLst/>
+                <a:uFillTx/>
+                <a:latin typeface="Arial"/>
+              </a:rPr>
+              <a:t>1. SecureAccess Control(28h)</a:t>
+            </a:r>
+            <a:endParaRPr lang="en-US" sz="1000" b="0" u="none" strike="noStrike">
+              <a:solidFill>
+                <a:srgbClr val="000000"/>
+              </a:solidFill>
+              <a:effectLst/>
+              <a:uFillTx/>
+              <a:latin typeface="Arial"/>
+            </a:endParaRPr>
+          </a:p>
+          <a:p>
+            <a:endParaRPr lang="en-US" sz="1000" b="0" u="none" strike="noStrike">
+              <a:solidFill>
+                <a:srgbClr val="000000"/>
+              </a:solidFill>
+              <a:effectLst/>
+              <a:uFillTx/>
+              <a:latin typeface="Arial"/>
+            </a:endParaRPr>
+          </a:p>
+          <a:p>
+            <a:pPr marL="36000">
+              <a:spcBef>
+                <a:spcPts val="1057"/>
+              </a:spcBef>
+            </a:pPr>
+            <a:r>
+              <a:rPr lang="en-US" sz="1000" b="0" u="none" strike="noStrike">
+                <a:solidFill>
+                  <a:srgbClr val="000000"/>
+                </a:solidFill>
+                <a:effectLst/>
+                <a:uFillTx/>
+                <a:latin typeface="Arial"/>
+              </a:rPr>
+              <a:t>2. Control DTC Setting (85h)</a:t>
+            </a:r>
+            <a:endParaRPr lang="en-US" sz="1000" b="0" u="none" strike="noStrike">
+              <a:solidFill>
+                <a:srgbClr val="000000"/>
+              </a:solidFill>
+              <a:effectLst/>
+              <a:uFillTx/>
+              <a:latin typeface="Arial"/>
+            </a:endParaRPr>
+          </a:p>
+          <a:p>
+            <a:pPr marL="36000">
+              <a:spcBef>
+                <a:spcPts val="1057"/>
+              </a:spcBef>
+            </a:pPr>
+            <a:r>
+              <a:rPr lang="en-US" sz="1000" b="0" u="none" strike="noStrike">
+                <a:solidFill>
+                  <a:srgbClr val="000000"/>
+                </a:solidFill>
+                <a:effectLst/>
+                <a:uFillTx/>
+                <a:latin typeface="Arial"/>
+              </a:rPr>
+              <a:t>3. Communication Control (28h)</a:t>
+            </a:r>
+            <a:endParaRPr lang="en-US" sz="1000" b="0" u="none" strike="noStrike">
+              <a:solidFill>
+                <a:srgbClr val="000000"/>
+              </a:solidFill>
+              <a:effectLst/>
+              <a:uFillTx/>
+              <a:latin typeface="Arial"/>
+            </a:endParaRPr>
+          </a:p>
+          <a:p>
+            <a:pPr marL="36000">
+              <a:spcBef>
+                <a:spcPts val="1057"/>
+              </a:spcBef>
+            </a:pPr>
+            <a:r>
+              <a:rPr lang="en-US" sz="1000" b="0" u="none" strike="noStrike">
+                <a:solidFill>
+                  <a:srgbClr val="000000"/>
+                </a:solidFill>
+                <a:effectLst/>
+                <a:uFillTx/>
+                <a:latin typeface="Arial"/>
+              </a:rPr>
+              <a:t>4. Diagnostic Session Control (10h 02h)</a:t>
+            </a:r>
+            <a:endParaRPr lang="en-US" sz="1000" b="0" u="none" strike="noStrike">
+              <a:solidFill>
+                <a:srgbClr val="000000"/>
+              </a:solidFill>
+              <a:effectLst/>
+              <a:uFillTx/>
+              <a:latin typeface="Arial"/>
+            </a:endParaRPr>
+          </a:p>
+          <a:p>
+            <a:pPr marL="36000">
+              <a:spcBef>
+                <a:spcPts val="1057"/>
+              </a:spcBef>
+            </a:pPr>
+            <a:r>
+              <a:rPr lang="en-US" sz="1000" b="0" u="none" strike="noStrike">
+                <a:solidFill>
+                  <a:srgbClr val="000000"/>
+                </a:solidFill>
+                <a:effectLst/>
+                <a:uFillTx/>
+                <a:latin typeface="Arial"/>
+              </a:rPr>
+              <a:t>5. Security Access (27h)</a:t>
+            </a:r>
+            <a:endParaRPr lang="en-US" sz="1000" b="0" u="none" strike="noStrike">
+              <a:solidFill>
+                <a:srgbClr val="000000"/>
+              </a:solidFill>
+              <a:effectLst/>
+              <a:uFillTx/>
+              <a:latin typeface="Arial"/>
+            </a:endParaRPr>
+          </a:p>
+          <a:p>
+            <a:pPr marL="36000">
+              <a:spcBef>
+                <a:spcPts val="1057"/>
+              </a:spcBef>
+            </a:pPr>
+            <a:r>
+              <a:rPr lang="en-US" sz="1000" b="0" u="none" strike="noStrike">
+                <a:solidFill>
+                  <a:srgbClr val="000000"/>
+                </a:solidFill>
+                <a:effectLst/>
+                <a:uFillTx/>
+                <a:latin typeface="Arial"/>
+              </a:rPr>
+              <a:t> </a:t>
+            </a:r>
+            <a:endParaRPr lang="en-US" sz="1000" b="0" u="none" strike="noStrike">
+              <a:solidFill>
+                <a:srgbClr val="000000"/>
+              </a:solidFill>
+              <a:effectLst/>
+              <a:uFillTx/>
+              <a:latin typeface="Arial"/>
+            </a:endParaRPr>
+          </a:p>
+          <a:p>
+            <a:pPr marL="36000">
+              <a:spcBef>
+                <a:spcPts val="1057"/>
+              </a:spcBef>
+            </a:pPr>
+            <a:r>
+              <a:rPr lang="en-US" sz="1000" b="0" u="none" strike="noStrike">
+                <a:solidFill>
+                  <a:srgbClr val="000000"/>
+                </a:solidFill>
+                <a:effectLst/>
+                <a:uFillTx/>
+                <a:latin typeface="Arial"/>
+              </a:rPr>
+              <a:t> </a:t>
+            </a:r>
+            <a:endParaRPr lang="en-US" sz="1000" b="0" u="none" strike="noStrike">
+              <a:solidFill>
+                <a:srgbClr val="000000"/>
+              </a:solidFill>
+              <a:effectLst/>
+              <a:uFillTx/>
+              <a:latin typeface="Arial"/>
+            </a:endParaRPr>
+          </a:p>
+        </p:txBody>
+      </p:sp>
+      <p:sp>
+        <p:nvSpPr>
+          <p:cNvPr id="4" name="PlaceHolder 3"/>
           <p:cNvSpPr>
             <a:spLocks noGrp="1"/>
           </p:cNvSpPr>
@@ -22589,7 +23122,7 @@
         <p:txBody>
           <a:bodyPr/>
           <a:p>
-            <a:fld id="{22B5707F-D049-493F-A521-025AB384F0C8}" type="slidenum">
+            <a:fld id="{DC7CD275-6567-4082-BDB4-60009B4881EA}" type="slidenum">
               <a:t>4</a:t>
             </a:fld>
           </a:p>
@@ -22789,62 +23322,6 @@
         </p:nvSpPr>
         <p:spPr>
           <a:xfrm>
-            <a:off x="540000" y="3060000"/>
-            <a:ext cx="2700000" cy="1800000"/>
-          </a:xfrm>
-          <a:prstGeom prst="rect">
-            <a:avLst/>
-          </a:prstGeom>
-          <a:noFill/>
-          <a:ln w="0">
-            <a:noFill/>
-          </a:ln>
-        </p:spPr>
-        <p:txBody>
-          <a:bodyPr lIns="0" tIns="0" rIns="0" bIns="0" anchor="t">
-            <a:normAutofit/>
-          </a:bodyPr>
-          <a:p>
-            <a:pPr marL="432000" indent="0" algn="l">
-              <a:spcBef>
-                <a:spcPts val="1057"/>
-              </a:spcBef>
-              <a:buNone/>
-            </a:pPr>
-            <a:r>
-              <a:rPr lang="en-US" sz="2400" b="0" u="none" strike="noStrike">
-                <a:solidFill>
-                  <a:srgbClr val="000000"/>
-                </a:solidFill>
-                <a:effectLst/>
-                <a:uFillTx/>
-                <a:latin typeface="Arial"/>
-              </a:rPr>
-              <a:t> </a:t>
-            </a:r>
-            <a:endParaRPr lang="en-US" sz="2400" b="0" u="none" strike="noStrike">
-              <a:solidFill>
-                <a:srgbClr val="000000"/>
-              </a:solidFill>
-              <a:effectLst/>
-              <a:uFillTx/>
-              <a:latin typeface="Arial"/>
-            </a:endParaRPr>
-          </a:p>
-        </p:txBody>
-      </p:sp>
-      <p:sp>
-        <p:nvSpPr>
-          <p:cNvPr id="174" name="PlaceHolder 3"/>
-          <p:cNvSpPr>
-            <a:spLocks noGrp="1"/>
-          </p:cNvSpPr>
-          <p:nvPr>
-            <p:ph/>
-          </p:nvPr>
-        </p:nvSpPr>
-        <p:spPr>
-          <a:xfrm>
             <a:off x="3420000" y="894240"/>
             <a:ext cx="6480000" cy="4320000"/>
           </a:xfrm>
@@ -23753,7 +24230,7 @@
       </p:sp>
       <p:pic>
         <p:nvPicPr>
-          <p:cNvPr id="175" name=""/>
+          <p:cNvPr id="174" name=""/>
           <p:cNvPicPr/>
           <p:nvPr/>
         </p:nvPicPr>
@@ -23777,7 +24254,7 @@
       </p:pic>
       <p:pic>
         <p:nvPicPr>
-          <p:cNvPr id="176" name=""/>
+          <p:cNvPr id="175" name=""/>
           <p:cNvPicPr/>
           <p:nvPr/>
         </p:nvPicPr>
@@ -23801,7 +24278,194 @@
       </p:pic>
       <p:sp>
         <p:nvSpPr>
-          <p:cNvPr id="5" name="PlaceHolder 4"/>
+          <p:cNvPr id="176" name=""/>
+          <p:cNvSpPr txBox="1"/>
+          <p:nvPr/>
+        </p:nvSpPr>
+        <p:spPr>
+          <a:xfrm>
+            <a:off x="360000" y="3060000"/>
+            <a:ext cx="2880000" cy="2160000"/>
+          </a:xfrm>
+          <a:prstGeom prst="rect">
+            <a:avLst/>
+          </a:prstGeom>
+          <a:noFill/>
+          <a:ln w="0">
+            <a:noFill/>
+          </a:ln>
+        </p:spPr>
+        <p:txBody>
+          <a:bodyPr lIns="0" tIns="0" rIns="0" bIns="0" anchor="t">
+            <a:normAutofit/>
+          </a:bodyPr>
+          <a:p>
+            <a:pPr marL="36000">
+              <a:spcBef>
+                <a:spcPts val="1057"/>
+              </a:spcBef>
+              <a:buClr>
+                <a:srgbClr val="FF8000"/>
+              </a:buClr>
+              <a:buSzPct val="45000"/>
+              <a:buFont typeface="Wingdings" charset="2"/>
+              <a:buChar char=""/>
+            </a:pPr>
+            <a:r>
+              <a:rPr lang="en-US" sz="1000" b="0" u="none" strike="noStrike">
+                <a:solidFill>
+                  <a:srgbClr val="000000"/>
+                </a:solidFill>
+                <a:effectLst/>
+                <a:uFillTx/>
+                <a:latin typeface="Arial"/>
+              </a:rPr>
+              <a:t> </a:t>
+            </a:r>
+            <a:endParaRPr lang="en-US" sz="1000" b="0" u="none" strike="noStrike">
+              <a:solidFill>
+                <a:srgbClr val="000000"/>
+              </a:solidFill>
+              <a:effectLst/>
+              <a:uFillTx/>
+              <a:latin typeface="Arial"/>
+            </a:endParaRPr>
+          </a:p>
+          <a:p>
+            <a:pPr marL="36000">
+              <a:spcBef>
+                <a:spcPts val="1057"/>
+              </a:spcBef>
+            </a:pPr>
+            <a:r>
+              <a:rPr lang="en-US" sz="1000" b="0" u="none" strike="noStrike">
+                <a:solidFill>
+                  <a:srgbClr val="000000"/>
+                </a:solidFill>
+                <a:effectLst/>
+                <a:uFillTx/>
+                <a:latin typeface="Arial"/>
+              </a:rPr>
+              <a:t>1. Routine Control (31h)</a:t>
+            </a:r>
+            <a:endParaRPr lang="en-US" sz="1000" b="0" u="none" strike="noStrike">
+              <a:solidFill>
+                <a:srgbClr val="000000"/>
+              </a:solidFill>
+              <a:effectLst/>
+              <a:uFillTx/>
+              <a:latin typeface="Arial"/>
+            </a:endParaRPr>
+          </a:p>
+          <a:p>
+            <a:pPr marL="36000">
+              <a:spcBef>
+                <a:spcPts val="1057"/>
+              </a:spcBef>
+            </a:pPr>
+            <a:r>
+              <a:rPr lang="en-US" sz="1000" b="0" u="none" strike="noStrike">
+                <a:solidFill>
+                  <a:srgbClr val="000000"/>
+                </a:solidFill>
+                <a:effectLst/>
+                <a:uFillTx/>
+                <a:latin typeface="Arial"/>
+              </a:rPr>
+              <a:t>2. Request Download (34h)</a:t>
+            </a:r>
+            <a:endParaRPr lang="en-US" sz="1000" b="0" u="none" strike="noStrike">
+              <a:solidFill>
+                <a:srgbClr val="000000"/>
+              </a:solidFill>
+              <a:effectLst/>
+              <a:uFillTx/>
+              <a:latin typeface="Arial"/>
+            </a:endParaRPr>
+          </a:p>
+          <a:p>
+            <a:pPr marL="36000">
+              <a:spcBef>
+                <a:spcPts val="1057"/>
+              </a:spcBef>
+            </a:pPr>
+            <a:r>
+              <a:rPr lang="en-US" sz="1000" b="0" u="none" strike="noStrike">
+                <a:solidFill>
+                  <a:srgbClr val="000000"/>
+                </a:solidFill>
+                <a:effectLst/>
+                <a:uFillTx/>
+                <a:latin typeface="Arial"/>
+              </a:rPr>
+              <a:t> </a:t>
+            </a:r>
+            <a:endParaRPr lang="en-US" sz="1000" b="0" u="none" strike="noStrike">
+              <a:solidFill>
+                <a:srgbClr val="000000"/>
+              </a:solidFill>
+              <a:effectLst/>
+              <a:uFillTx/>
+              <a:latin typeface="Arial"/>
+            </a:endParaRPr>
+          </a:p>
+          <a:p>
+            <a:pPr marL="36000">
+              <a:spcBef>
+                <a:spcPts val="1057"/>
+              </a:spcBef>
+            </a:pPr>
+            <a:r>
+              <a:rPr lang="en-US" sz="1000" b="0" u="none" strike="noStrike">
+                <a:solidFill>
+                  <a:srgbClr val="000000"/>
+                </a:solidFill>
+                <a:effectLst/>
+                <a:uFillTx/>
+                <a:latin typeface="Arial"/>
+              </a:rPr>
+              <a:t> </a:t>
+            </a:r>
+            <a:endParaRPr lang="en-US" sz="1000" b="0" u="none" strike="noStrike">
+              <a:solidFill>
+                <a:srgbClr val="000000"/>
+              </a:solidFill>
+              <a:effectLst/>
+              <a:uFillTx/>
+              <a:latin typeface="Arial"/>
+            </a:endParaRPr>
+          </a:p>
+          <a:p>
+            <a:pPr marL="36000">
+              <a:spcBef>
+                <a:spcPts val="1057"/>
+              </a:spcBef>
+            </a:pPr>
+            <a:r>
+              <a:rPr lang="en-US" sz="1000" b="0" u="none" strike="noStrike">
+                <a:solidFill>
+                  <a:srgbClr val="000000"/>
+                </a:solidFill>
+                <a:effectLst/>
+                <a:uFillTx/>
+                <a:latin typeface="Arial"/>
+              </a:rPr>
+              <a:t> </a:t>
+            </a:r>
+            <a:endParaRPr lang="en-US" sz="1000" b="0" u="none" strike="noStrike">
+              <a:solidFill>
+                <a:srgbClr val="000000"/>
+              </a:solidFill>
+              <a:effectLst/>
+              <a:uFillTx/>
+              <a:latin typeface="Arial"/>
+            </a:endParaRPr>
+          </a:p>
+        </p:txBody>
+      </p:sp>
+      <p:sp>
+        <p:nvSpPr>
+          <p:cNvPr id="4" name="PlaceHolder 3"/>
           <p:cNvSpPr>
             <a:spLocks noGrp="1"/>
           </p:cNvSpPr>
@@ -23813,7 +24477,7 @@
         <p:txBody>
           <a:bodyPr/>
           <a:p>
-            <a:fld id="{8DE3FB95-01F4-4C3F-A054-41764C092A2B}" type="slidenum">
+            <a:fld id="{533A23FD-44EE-45FC-96EF-2841538138D8}" type="slidenum">
               <a:t>5</a:t>
             </a:fld>
           </a:p>
@@ -23969,62 +24633,6 @@
         </p:nvSpPr>
         <p:spPr>
           <a:xfrm>
-            <a:off x="540000" y="3060000"/>
-            <a:ext cx="2700000" cy="1800000"/>
-          </a:xfrm>
-          <a:prstGeom prst="rect">
-            <a:avLst/>
-          </a:prstGeom>
-          <a:noFill/>
-          <a:ln w="0">
-            <a:noFill/>
-          </a:ln>
-        </p:spPr>
-        <p:txBody>
-          <a:bodyPr lIns="0" tIns="0" rIns="0" bIns="0" anchor="t">
-            <a:normAutofit/>
-          </a:bodyPr>
-          <a:p>
-            <a:pPr marL="432000" indent="0" algn="l">
-              <a:spcBef>
-                <a:spcPts val="1057"/>
-              </a:spcBef>
-              <a:buNone/>
-            </a:pPr>
-            <a:r>
-              <a:rPr lang="en-US" sz="2400" b="0" u="none" strike="noStrike">
-                <a:solidFill>
-                  <a:srgbClr val="000000"/>
-                </a:solidFill>
-                <a:effectLst/>
-                <a:uFillTx/>
-                <a:latin typeface="Arial"/>
-              </a:rPr>
-              <a:t> </a:t>
-            </a:r>
-            <a:endParaRPr lang="en-US" sz="2400" b="0" u="none" strike="noStrike">
-              <a:solidFill>
-                <a:srgbClr val="000000"/>
-              </a:solidFill>
-              <a:effectLst/>
-              <a:uFillTx/>
-              <a:latin typeface="Arial"/>
-            </a:endParaRPr>
-          </a:p>
-        </p:txBody>
-      </p:sp>
-      <p:sp>
-        <p:nvSpPr>
-          <p:cNvPr id="179" name="PlaceHolder 3"/>
-          <p:cNvSpPr>
-            <a:spLocks noGrp="1"/>
-          </p:cNvSpPr>
-          <p:nvPr>
-            <p:ph/>
-          </p:nvPr>
-        </p:nvSpPr>
-        <p:spPr>
-          <a:xfrm>
             <a:off x="3420000" y="894240"/>
             <a:ext cx="6480000" cy="4320000"/>
           </a:xfrm>
@@ -24687,7 +25295,7 @@
       </p:sp>
       <p:pic>
         <p:nvPicPr>
-          <p:cNvPr id="180" name=""/>
+          <p:cNvPr id="179" name=""/>
           <p:cNvPicPr/>
           <p:nvPr/>
         </p:nvPicPr>
@@ -24711,7 +25319,7 @@
       </p:pic>
       <p:pic>
         <p:nvPicPr>
-          <p:cNvPr id="181" name=""/>
+          <p:cNvPr id="180" name=""/>
           <p:cNvPicPr/>
           <p:nvPr/>
         </p:nvPicPr>
@@ -24735,7 +25343,194 @@
       </p:pic>
       <p:sp>
         <p:nvSpPr>
-          <p:cNvPr id="5" name="PlaceHolder 4"/>
+          <p:cNvPr id="181" name=""/>
+          <p:cNvSpPr txBox="1"/>
+          <p:nvPr/>
+        </p:nvSpPr>
+        <p:spPr>
+          <a:xfrm>
+            <a:off x="360000" y="3060000"/>
+            <a:ext cx="2880000" cy="2160000"/>
+          </a:xfrm>
+          <a:prstGeom prst="rect">
+            <a:avLst/>
+          </a:prstGeom>
+          <a:noFill/>
+          <a:ln w="0">
+            <a:noFill/>
+          </a:ln>
+        </p:spPr>
+        <p:txBody>
+          <a:bodyPr lIns="0" tIns="0" rIns="0" bIns="0" anchor="t">
+            <a:normAutofit/>
+          </a:bodyPr>
+          <a:p>
+            <a:pPr marL="36000">
+              <a:spcBef>
+                <a:spcPts val="1057"/>
+              </a:spcBef>
+              <a:buClr>
+                <a:srgbClr val="FF8000"/>
+              </a:buClr>
+              <a:buSzPct val="45000"/>
+              <a:buFont typeface="Wingdings" charset="2"/>
+              <a:buChar char=""/>
+            </a:pPr>
+            <a:r>
+              <a:rPr lang="en-US" sz="1000" b="0" u="none" strike="noStrike">
+                <a:solidFill>
+                  <a:srgbClr val="000000"/>
+                </a:solidFill>
+                <a:effectLst/>
+                <a:uFillTx/>
+                <a:latin typeface="Arial"/>
+              </a:rPr>
+              <a:t> </a:t>
+            </a:r>
+            <a:endParaRPr lang="en-US" sz="1000" b="0" u="none" strike="noStrike">
+              <a:solidFill>
+                <a:srgbClr val="000000"/>
+              </a:solidFill>
+              <a:effectLst/>
+              <a:uFillTx/>
+              <a:latin typeface="Arial"/>
+            </a:endParaRPr>
+          </a:p>
+          <a:p>
+            <a:pPr marL="36000">
+              <a:spcBef>
+                <a:spcPts val="1057"/>
+              </a:spcBef>
+            </a:pPr>
+            <a:r>
+              <a:rPr lang="en-US" sz="1000" b="0" u="none" strike="noStrike">
+                <a:solidFill>
+                  <a:srgbClr val="000000"/>
+                </a:solidFill>
+                <a:effectLst/>
+                <a:uFillTx/>
+                <a:latin typeface="Arial"/>
+              </a:rPr>
+              <a:t>1. Request Downlod (34h)</a:t>
+            </a:r>
+            <a:endParaRPr lang="en-US" sz="1000" b="0" u="none" strike="noStrike">
+              <a:solidFill>
+                <a:srgbClr val="000000"/>
+              </a:solidFill>
+              <a:effectLst/>
+              <a:uFillTx/>
+              <a:latin typeface="Arial"/>
+            </a:endParaRPr>
+          </a:p>
+          <a:p>
+            <a:pPr marL="36000">
+              <a:spcBef>
+                <a:spcPts val="1057"/>
+              </a:spcBef>
+            </a:pPr>
+            <a:r>
+              <a:rPr lang="en-US" sz="1000" b="0" u="none" strike="noStrike">
+                <a:solidFill>
+                  <a:srgbClr val="000000"/>
+                </a:solidFill>
+                <a:effectLst/>
+                <a:uFillTx/>
+                <a:latin typeface="Arial"/>
+              </a:rPr>
+              <a:t>2. TransferData (36h)</a:t>
+            </a:r>
+            <a:endParaRPr lang="en-US" sz="1000" b="0" u="none" strike="noStrike">
+              <a:solidFill>
+                <a:srgbClr val="000000"/>
+              </a:solidFill>
+              <a:effectLst/>
+              <a:uFillTx/>
+              <a:latin typeface="Arial"/>
+            </a:endParaRPr>
+          </a:p>
+          <a:p>
+            <a:pPr marL="36000">
+              <a:spcBef>
+                <a:spcPts val="1057"/>
+              </a:spcBef>
+            </a:pPr>
+            <a:r>
+              <a:rPr lang="en-US" sz="1000" b="0" u="none" strike="noStrike">
+                <a:solidFill>
+                  <a:srgbClr val="000000"/>
+                </a:solidFill>
+                <a:effectLst/>
+                <a:uFillTx/>
+                <a:latin typeface="Arial"/>
+              </a:rPr>
+              <a:t>3. Request Transfer Exit (37h)</a:t>
+            </a:r>
+            <a:endParaRPr lang="en-US" sz="1000" b="0" u="none" strike="noStrike">
+              <a:solidFill>
+                <a:srgbClr val="000000"/>
+              </a:solidFill>
+              <a:effectLst/>
+              <a:uFillTx/>
+              <a:latin typeface="Arial"/>
+            </a:endParaRPr>
+          </a:p>
+          <a:p>
+            <a:pPr marL="36000">
+              <a:spcBef>
+                <a:spcPts val="1057"/>
+              </a:spcBef>
+            </a:pPr>
+            <a:r>
+              <a:rPr lang="en-US" sz="1000" b="0" u="none" strike="noStrike">
+                <a:solidFill>
+                  <a:srgbClr val="000000"/>
+                </a:solidFill>
+                <a:effectLst/>
+                <a:uFillTx/>
+                <a:latin typeface="Arial"/>
+              </a:rPr>
+              <a:t> </a:t>
+            </a:r>
+            <a:endParaRPr lang="en-US" sz="1000" b="0" u="none" strike="noStrike">
+              <a:solidFill>
+                <a:srgbClr val="000000"/>
+              </a:solidFill>
+              <a:effectLst/>
+              <a:uFillTx/>
+              <a:latin typeface="Arial"/>
+            </a:endParaRPr>
+          </a:p>
+          <a:p>
+            <a:pPr marL="36000">
+              <a:spcBef>
+                <a:spcPts val="1057"/>
+              </a:spcBef>
+            </a:pPr>
+            <a:r>
+              <a:rPr lang="en-US" sz="1000" b="0" u="none" strike="noStrike">
+                <a:solidFill>
+                  <a:srgbClr val="000000"/>
+                </a:solidFill>
+                <a:effectLst/>
+                <a:uFillTx/>
+                <a:latin typeface="Arial"/>
+              </a:rPr>
+              <a:t> </a:t>
+            </a:r>
+            <a:endParaRPr lang="en-US" sz="1000" b="0" u="none" strike="noStrike">
+              <a:solidFill>
+                <a:srgbClr val="000000"/>
+              </a:solidFill>
+              <a:effectLst/>
+              <a:uFillTx/>
+              <a:latin typeface="Arial"/>
+            </a:endParaRPr>
+          </a:p>
+        </p:txBody>
+      </p:sp>
+      <p:sp>
+        <p:nvSpPr>
+          <p:cNvPr id="4" name="PlaceHolder 3"/>
           <p:cNvSpPr>
             <a:spLocks noGrp="1"/>
           </p:cNvSpPr>
@@ -24747,7 +25542,7 @@
         <p:txBody>
           <a:bodyPr/>
           <a:p>
-            <a:fld id="{A8A60F24-C432-4065-A10B-9205E0002AC0}" type="slidenum">
+            <a:fld id="{1AC9E0C5-9DA7-4BE0-B07C-6B34E15424EF}" type="slidenum">
               <a:t>6</a:t>
             </a:fld>
           </a:p>
@@ -24925,62 +25720,6 @@
         </p:nvSpPr>
         <p:spPr>
           <a:xfrm>
-            <a:off x="540000" y="3060000"/>
-            <a:ext cx="2700000" cy="1800000"/>
-          </a:xfrm>
-          <a:prstGeom prst="rect">
-            <a:avLst/>
-          </a:prstGeom>
-          <a:noFill/>
-          <a:ln w="0">
-            <a:noFill/>
-          </a:ln>
-        </p:spPr>
-        <p:txBody>
-          <a:bodyPr lIns="0" tIns="0" rIns="0" bIns="0" anchor="t">
-            <a:normAutofit/>
-          </a:bodyPr>
-          <a:p>
-            <a:pPr marL="432000" indent="0" algn="l">
-              <a:spcBef>
-                <a:spcPts val="1057"/>
-              </a:spcBef>
-              <a:buNone/>
-            </a:pPr>
-            <a:r>
-              <a:rPr lang="en-US" sz="2400" b="0" u="none" strike="noStrike">
-                <a:solidFill>
-                  <a:srgbClr val="000000"/>
-                </a:solidFill>
-                <a:effectLst/>
-                <a:uFillTx/>
-                <a:latin typeface="Arial"/>
-              </a:rPr>
-              <a:t> </a:t>
-            </a:r>
-            <a:endParaRPr lang="en-US" sz="2400" b="0" u="none" strike="noStrike">
-              <a:solidFill>
-                <a:srgbClr val="000000"/>
-              </a:solidFill>
-              <a:effectLst/>
-              <a:uFillTx/>
-              <a:latin typeface="Arial"/>
-            </a:endParaRPr>
-          </a:p>
-        </p:txBody>
-      </p:sp>
-      <p:sp>
-        <p:nvSpPr>
-          <p:cNvPr id="184" name="PlaceHolder 3"/>
-          <p:cNvSpPr>
-            <a:spLocks noGrp="1"/>
-          </p:cNvSpPr>
-          <p:nvPr>
-            <p:ph/>
-          </p:nvPr>
-        </p:nvSpPr>
-        <p:spPr>
-          <a:xfrm>
             <a:off x="3420000" y="894240"/>
             <a:ext cx="6480000" cy="4320000"/>
           </a:xfrm>
@@ -25700,7 +26439,7 @@
       </p:sp>
       <p:pic>
         <p:nvPicPr>
-          <p:cNvPr id="185" name=""/>
+          <p:cNvPr id="184" name=""/>
           <p:cNvPicPr/>
           <p:nvPr/>
         </p:nvPicPr>
@@ -25724,7 +26463,7 @@
       </p:pic>
       <p:pic>
         <p:nvPicPr>
-          <p:cNvPr id="186" name=""/>
+          <p:cNvPr id="185" name=""/>
           <p:cNvPicPr/>
           <p:nvPr/>
         </p:nvPicPr>
@@ -25748,7 +26487,227 @@
       </p:pic>
       <p:sp>
         <p:nvSpPr>
-          <p:cNvPr id="5" name="PlaceHolder 4"/>
+          <p:cNvPr id="186" name=""/>
+          <p:cNvSpPr txBox="1"/>
+          <p:nvPr/>
+        </p:nvSpPr>
+        <p:spPr>
+          <a:xfrm>
+            <a:off x="360000" y="3060000"/>
+            <a:ext cx="2880000" cy="2160000"/>
+          </a:xfrm>
+          <a:prstGeom prst="rect">
+            <a:avLst/>
+          </a:prstGeom>
+          <a:noFill/>
+          <a:ln w="0">
+            <a:noFill/>
+          </a:ln>
+        </p:spPr>
+        <p:txBody>
+          <a:bodyPr lIns="0" tIns="0" rIns="0" bIns="0" anchor="t">
+            <a:normAutofit/>
+          </a:bodyPr>
+          <a:p>
+            <a:pPr marL="36000">
+              <a:spcBef>
+                <a:spcPts val="1057"/>
+              </a:spcBef>
+              <a:buClr>
+                <a:srgbClr val="FF8000"/>
+              </a:buClr>
+              <a:buSzPct val="45000"/>
+              <a:buFont typeface="Wingdings" charset="2"/>
+              <a:buChar char=""/>
+            </a:pPr>
+            <a:r>
+              <a:rPr lang="en-US" sz="1000" b="0" u="none" strike="noStrike">
+                <a:solidFill>
+                  <a:srgbClr val="000000"/>
+                </a:solidFill>
+                <a:effectLst/>
+                <a:uFillTx/>
+                <a:latin typeface="Arial"/>
+              </a:rPr>
+              <a:t> </a:t>
+            </a:r>
+            <a:endParaRPr lang="en-US" sz="1000" b="0" u="none" strike="noStrike">
+              <a:solidFill>
+                <a:srgbClr val="000000"/>
+              </a:solidFill>
+              <a:effectLst/>
+              <a:uFillTx/>
+              <a:latin typeface="Arial"/>
+            </a:endParaRPr>
+          </a:p>
+          <a:p>
+            <a:pPr marL="36000">
+              <a:spcBef>
+                <a:spcPts val="1057"/>
+              </a:spcBef>
+            </a:pPr>
+            <a:r>
+              <a:rPr lang="en-US" sz="1000" b="0" u="none" strike="noStrike">
+                <a:solidFill>
+                  <a:srgbClr val="000000"/>
+                </a:solidFill>
+                <a:effectLst/>
+                <a:uFillTx/>
+                <a:latin typeface="Arial"/>
+              </a:rPr>
+              <a:t>1. Request Transfer Exit (37h)</a:t>
+            </a:r>
+            <a:endParaRPr lang="en-US" sz="1000" b="0" u="none" strike="noStrike">
+              <a:solidFill>
+                <a:srgbClr val="000000"/>
+              </a:solidFill>
+              <a:effectLst/>
+              <a:uFillTx/>
+              <a:latin typeface="Arial"/>
+            </a:endParaRPr>
+          </a:p>
+          <a:p>
+            <a:pPr marL="36000">
+              <a:spcBef>
+                <a:spcPts val="1057"/>
+              </a:spcBef>
+            </a:pPr>
+            <a:r>
+              <a:rPr lang="en-US" sz="1000" b="0" u="none" strike="noStrike">
+                <a:solidFill>
+                  <a:srgbClr val="000000"/>
+                </a:solidFill>
+                <a:effectLst/>
+                <a:uFillTx/>
+                <a:latin typeface="Arial"/>
+              </a:rPr>
+              <a:t>2. Transfer Data (36h)</a:t>
+            </a:r>
+            <a:endParaRPr lang="en-US" sz="1000" b="0" u="none" strike="noStrike">
+              <a:solidFill>
+                <a:srgbClr val="000000"/>
+              </a:solidFill>
+              <a:effectLst/>
+              <a:uFillTx/>
+              <a:latin typeface="Arial"/>
+            </a:endParaRPr>
+          </a:p>
+          <a:p>
+            <a:pPr marL="36000">
+              <a:spcBef>
+                <a:spcPts val="1057"/>
+              </a:spcBef>
+            </a:pPr>
+            <a:r>
+              <a:rPr lang="en-US" sz="1000" b="0" u="none" strike="noStrike">
+                <a:solidFill>
+                  <a:srgbClr val="000000"/>
+                </a:solidFill>
+                <a:effectLst/>
+                <a:uFillTx/>
+                <a:latin typeface="Arial"/>
+              </a:rPr>
+              <a:t>3  … </a:t>
+            </a:r>
+            <a:r>
+              <a:rPr lang="ko-KR" sz="1000" b="0" u="none" strike="noStrike">
+                <a:solidFill>
+                  <a:srgbClr val="000000"/>
+                </a:solidFill>
+                <a:effectLst/>
+                <a:uFillTx/>
+                <a:latin typeface="Arial"/>
+              </a:rPr>
+              <a:t>이하 </a:t>
+            </a:r>
+            <a:r>
+              <a:rPr lang="en-US" sz="1000" b="0" u="none" strike="noStrike">
+                <a:solidFill>
+                  <a:srgbClr val="000000"/>
+                </a:solidFill>
+                <a:effectLst/>
+                <a:uFillTx/>
+                <a:latin typeface="Arial"/>
+              </a:rPr>
+              <a:t>Download </a:t>
+            </a:r>
+            <a:r>
+              <a:rPr lang="ko-KR" sz="1000" b="0" u="none" strike="noStrike">
+                <a:solidFill>
+                  <a:srgbClr val="000000"/>
+                </a:solidFill>
+                <a:effectLst/>
+                <a:uFillTx/>
+                <a:latin typeface="Arial"/>
+              </a:rPr>
+              <a:t>반복</a:t>
+            </a:r>
+            <a:endParaRPr lang="en-US" sz="1000" b="0" u="none" strike="noStrike">
+              <a:solidFill>
+                <a:srgbClr val="000000"/>
+              </a:solidFill>
+              <a:effectLst/>
+              <a:uFillTx/>
+              <a:latin typeface="Arial"/>
+            </a:endParaRPr>
+          </a:p>
+          <a:p>
+            <a:pPr marL="36000">
+              <a:spcBef>
+                <a:spcPts val="1057"/>
+              </a:spcBef>
+            </a:pPr>
+            <a:r>
+              <a:rPr lang="en-US" sz="1000" b="0" u="none" strike="noStrike">
+                <a:solidFill>
+                  <a:srgbClr val="000000"/>
+                </a:solidFill>
+                <a:effectLst/>
+                <a:uFillTx/>
+                <a:latin typeface="Arial"/>
+              </a:rPr>
+              <a:t> </a:t>
+            </a:r>
+            <a:endParaRPr lang="en-US" sz="1000" b="0" u="none" strike="noStrike">
+              <a:solidFill>
+                <a:srgbClr val="000000"/>
+              </a:solidFill>
+              <a:effectLst/>
+              <a:uFillTx/>
+              <a:latin typeface="Arial"/>
+            </a:endParaRPr>
+          </a:p>
+          <a:p>
+            <a:pPr marL="36000">
+              <a:spcBef>
+                <a:spcPts val="1057"/>
+              </a:spcBef>
+            </a:pPr>
+            <a:r>
+              <a:rPr lang="en-US" sz="1000" b="0" u="none" strike="noStrike">
+                <a:solidFill>
+                  <a:srgbClr val="000000"/>
+                </a:solidFill>
+                <a:effectLst/>
+                <a:uFillTx/>
+                <a:latin typeface="Arial"/>
+              </a:rPr>
+              <a:t> </a:t>
+            </a:r>
+            <a:endParaRPr lang="en-US" sz="1000" b="0" u="none" strike="noStrike">
+              <a:solidFill>
+                <a:srgbClr val="000000"/>
+              </a:solidFill>
+              <a:effectLst/>
+              <a:uFillTx/>
+              <a:latin typeface="Arial"/>
+            </a:endParaRPr>
+          </a:p>
+        </p:txBody>
+      </p:sp>
+      <p:sp>
+        <p:nvSpPr>
+          <p:cNvPr id="4" name="PlaceHolder 3"/>
           <p:cNvSpPr>
             <a:spLocks noGrp="1"/>
           </p:cNvSpPr>
@@ -25760,7 +26719,7 @@
         <p:txBody>
           <a:bodyPr/>
           <a:p>
-            <a:fld id="{8DF41C3D-3041-402F-9EF7-D7C3E51D9623}" type="slidenum">
+            <a:fld id="{A8EC1FEE-8651-41D6-8C66-07D88C2B400B}" type="slidenum">
               <a:t>7</a:t>
             </a:fld>
           </a:p>
@@ -25938,8 +26897,8 @@
         </p:nvSpPr>
         <p:spPr>
           <a:xfrm>
-            <a:off x="540000" y="3060000"/>
-            <a:ext cx="2700000" cy="1800000"/>
+            <a:off x="360000" y="3060000"/>
+            <a:ext cx="2880000" cy="2160000"/>
           </a:xfrm>
           <a:prstGeom prst="rect">
             <a:avLst/>
@@ -25954,14 +26913,14 @@
             <a:normAutofit/>
           </a:bodyPr>
           <a:p>
-            <a:pPr marL="432000" indent="0" algn="l">
+            <a:pPr marL="36000" indent="0" algn="l">
               <a:spcBef>
                 <a:spcPts val="1057"/>
               </a:spcBef>
               <a:buNone/>
             </a:pPr>
             <a:r>
-              <a:rPr lang="en-US" sz="2400" b="0" u="none" strike="noStrike">
+              <a:rPr lang="en-US" sz="1000" b="0" u="none" strike="noStrike">
                 <a:solidFill>
                   <a:srgbClr val="000000"/>
                 </a:solidFill>
@@ -25971,7 +26930,113 @@
               </a:rPr>
               <a:t> </a:t>
             </a:r>
-            <a:endParaRPr lang="en-US" sz="2400" b="0" u="none" strike="noStrike">
+            <a:endParaRPr lang="en-US" sz="1000" b="0" u="none" strike="noStrike">
+              <a:solidFill>
+                <a:srgbClr val="000000"/>
+              </a:solidFill>
+              <a:effectLst/>
+              <a:uFillTx/>
+              <a:latin typeface="Arial"/>
+            </a:endParaRPr>
+          </a:p>
+          <a:p>
+            <a:pPr marL="36000" indent="0" algn="l">
+              <a:spcBef>
+                <a:spcPts val="1057"/>
+              </a:spcBef>
+              <a:buNone/>
+            </a:pPr>
+            <a:r>
+              <a:rPr lang="en-US" sz="1000" b="0" u="none" strike="noStrike">
+                <a:solidFill>
+                  <a:srgbClr val="000000"/>
+                </a:solidFill>
+                <a:effectLst/>
+                <a:uFillTx/>
+                <a:latin typeface="Arial"/>
+              </a:rPr>
+              <a:t>1. Request Transfer Exit (37h)</a:t>
+            </a:r>
+            <a:endParaRPr lang="en-US" sz="1000" b="0" u="none" strike="noStrike">
+              <a:solidFill>
+                <a:srgbClr val="000000"/>
+              </a:solidFill>
+              <a:effectLst/>
+              <a:uFillTx/>
+              <a:latin typeface="Arial"/>
+            </a:endParaRPr>
+          </a:p>
+          <a:p>
+            <a:pPr marL="36000" indent="0" algn="l">
+              <a:spcBef>
+                <a:spcPts val="1057"/>
+              </a:spcBef>
+            </a:pPr>
+            <a:r>
+              <a:rPr lang="en-US" sz="1000" b="0" u="none" strike="noStrike">
+                <a:solidFill>
+                  <a:srgbClr val="000000"/>
+                </a:solidFill>
+                <a:effectLst/>
+                <a:uFillTx/>
+                <a:latin typeface="Arial"/>
+              </a:rPr>
+              <a:t>2. Routine Control (31h)</a:t>
+            </a:r>
+            <a:endParaRPr lang="en-US" sz="1000" b="0" u="none" strike="noStrike">
+              <a:solidFill>
+                <a:srgbClr val="000000"/>
+              </a:solidFill>
+              <a:effectLst/>
+              <a:uFillTx/>
+              <a:latin typeface="Arial"/>
+            </a:endParaRPr>
+          </a:p>
+          <a:p>
+            <a:pPr marL="36000" indent="0" algn="l">
+              <a:spcBef>
+                <a:spcPts val="1057"/>
+              </a:spcBef>
+            </a:pPr>
+            <a:r>
+              <a:rPr lang="en-US" sz="1000" b="0" u="none" strike="noStrike">
+                <a:solidFill>
+                  <a:srgbClr val="000000"/>
+                </a:solidFill>
+                <a:effectLst/>
+                <a:uFillTx/>
+                <a:latin typeface="Arial"/>
+              </a:rPr>
+              <a:t>3. ECU Reset (11h) </a:t>
+            </a:r>
+            <a:endParaRPr lang="en-US" sz="1000" b="0" u="none" strike="noStrike">
+              <a:solidFill>
+                <a:srgbClr val="000000"/>
+              </a:solidFill>
+              <a:effectLst/>
+              <a:uFillTx/>
+              <a:latin typeface="Arial"/>
+            </a:endParaRPr>
+          </a:p>
+          <a:p>
+            <a:pPr marL="36000" indent="0" algn="l">
+              <a:spcBef>
+                <a:spcPts val="1057"/>
+              </a:spcBef>
+              <a:buNone/>
+            </a:pPr>
+            <a:r>
+              <a:rPr lang="en-US" sz="1000" b="0" u="none" strike="noStrike">
+                <a:solidFill>
+                  <a:srgbClr val="000000"/>
+                </a:solidFill>
+                <a:effectLst/>
+                <a:uFillTx/>
+                <a:latin typeface="Arial"/>
+              </a:rPr>
+              <a:t> </a:t>
+            </a:r>
+            <a:endParaRPr lang="en-US" sz="1000" b="0" u="none" strike="noStrike">
               <a:solidFill>
                 <a:srgbClr val="000000"/>
               </a:solidFill>
@@ -26458,7 +27523,7 @@
                 <a:latin typeface="D2Coding"/>
                 <a:ea typeface="D2Coding"/>
               </a:rPr>
-              <a:t>000007B8  8  04  71  01  FF  01  AA  AA  AA  230.629120 R - 70 01 (PR, Sub fn 01(Start Routine)) Routine Id FF 01</a:t>
+              <a:t>000007B8  8  04  71  01  FF  01  AA  AA  AA  230.629120 R - 71 01 (PR, Sub fn 01(Start Routine)) Routine Id FF 01</a:t>
             </a:r>
             <a:endParaRPr lang="en-US" sz="800" b="0" u="none" strike="noStrike">
               <a:solidFill>
@@ -26716,6 +27781,138 @@
       </p:pic>
       <p:sp>
         <p:nvSpPr>
+          <p:cNvPr id="192" name=""/>
+          <p:cNvSpPr/>
+          <p:nvPr/>
+        </p:nvSpPr>
+        <p:spPr>
+          <a:xfrm>
+            <a:off x="1800000" y="2340000"/>
+            <a:ext cx="540000" cy="0"/>
+          </a:xfrm>
+          <a:prstGeom prst="line">
+            <a:avLst/>
+          </a:prstGeom>
+          <a:ln w="25200">
+            <a:solidFill>
+              <a:srgbClr val="FF3366"/>
+            </a:solidFill>
+            <a:round/>
+            <a:tailEnd len="med" type="triangle" w="med"/>
+          </a:ln>
+        </p:spPr>
+        <p:style>
+          <a:lnRef idx="0"/>
+          <a:fillRef idx="0"/>
+          <a:effectRef idx="0"/>
+          <a:fontRef idx="minor"/>
+        </p:style>
+        <p:txBody>
+          <a:bodyPr lIns="90000" tIns="-45000" rIns="90000" bIns="-45000" anchor="ctr">
+            <a:noAutofit/>
+          </a:bodyPr>
+          <a:p>
+            <a:endParaRPr lang="en-US" sz="1800" b="0" u="none" strike="noStrike">
+              <a:solidFill>
+                <a:srgbClr val="000000"/>
+              </a:solidFill>
+              <a:effectLst/>
+              <a:uFillTx/>
+              <a:latin typeface="Arial"/>
+            </a:endParaRPr>
+          </a:p>
+        </p:txBody>
+      </p:sp>
+      <p:sp>
+        <p:nvSpPr>
+          <p:cNvPr id="193" name=""/>
+          <p:cNvSpPr/>
+          <p:nvPr/>
+        </p:nvSpPr>
+        <p:spPr>
+          <a:xfrm>
+            <a:off x="1800000" y="2160000"/>
+            <a:ext cx="540000" cy="0"/>
+          </a:xfrm>
+          <a:prstGeom prst="line">
+            <a:avLst/>
+          </a:prstGeom>
+          <a:ln w="25200">
+            <a:solidFill>
+              <a:srgbClr val="FF3366"/>
+            </a:solidFill>
+            <a:round/>
+            <a:tailEnd len="med" type="triangle" w="med"/>
+          </a:ln>
+        </p:spPr>
+        <p:style>
+          <a:lnRef idx="0"/>
+          <a:fillRef idx="0"/>
+          <a:effectRef idx="0"/>
+          <a:fontRef idx="minor"/>
+        </p:style>
+        <p:txBody>
+          <a:bodyPr lIns="90000" tIns="-45000" rIns="90000" bIns="-45000" anchor="ctr">
+            <a:noAutofit/>
+          </a:bodyPr>
+          <a:p>
+            <a:endParaRPr lang="en-US" sz="1800" b="0" u="none" strike="noStrike">
+              <a:solidFill>
+                <a:srgbClr val="000000"/>
+              </a:solidFill>
+              <a:effectLst/>
+              <a:uFillTx/>
+              <a:latin typeface="Arial"/>
+            </a:endParaRPr>
+          </a:p>
+        </p:txBody>
+      </p:sp>
+      <p:sp>
+        <p:nvSpPr>
+          <p:cNvPr id="194" name=""/>
+          <p:cNvSpPr/>
+          <p:nvPr/>
+        </p:nvSpPr>
+        <p:spPr>
+          <a:xfrm>
+            <a:off x="1800000" y="1980000"/>
+            <a:ext cx="540000" cy="0"/>
+          </a:xfrm>
+          <a:prstGeom prst="line">
+            <a:avLst/>
+          </a:prstGeom>
+          <a:ln w="25200">
+            <a:solidFill>
+              <a:srgbClr val="FF3366"/>
+            </a:solidFill>
+            <a:round/>
+            <a:tailEnd len="med" type="triangle" w="med"/>
+          </a:ln>
+        </p:spPr>
+        <p:style>
+          <a:lnRef idx="0"/>
+          <a:fillRef idx="0"/>
+          <a:effectRef idx="0"/>
+          <a:fontRef idx="minor"/>
+        </p:style>
+        <p:txBody>
+          <a:bodyPr lIns="90000" tIns="-45000" rIns="90000" bIns="-45000" anchor="ctr">
+            <a:noAutofit/>
+          </a:bodyPr>
+          <a:p>
+            <a:endParaRPr lang="en-US" sz="1800" b="0" u="none" strike="noStrike">
+              <a:solidFill>
+                <a:srgbClr val="000000"/>
+              </a:solidFill>
+              <a:effectLst/>
+              <a:uFillTx/>
+              <a:latin typeface="Arial"/>
+            </a:endParaRPr>
+          </a:p>
+        </p:txBody>
+      </p:sp>
+      <p:sp>
+        <p:nvSpPr>
           <p:cNvPr id="5" name="PlaceHolder 4"/>
           <p:cNvSpPr>
             <a:spLocks noGrp="1"/>
@@ -26728,7 +27925,7 @@
         <p:txBody>
           <a:bodyPr/>
           <a:p>
-            <a:fld id="{7FC74EAB-8DB7-4237-8FBC-2FE44790969D}" type="slidenum">
+            <a:fld id="{1E3947DD-D812-46DB-9660-3751F928E7B9}" type="slidenum">
               <a:t>8</a:t>
             </a:fld>
           </a:p>
@@ -26766,7 +27963,7 @@
       </p:grpSpPr>
       <p:sp>
         <p:nvSpPr>
-          <p:cNvPr id="192" name="PlaceHolder 1"/>
+          <p:cNvPr id="195" name="PlaceHolder 1"/>
           <p:cNvSpPr>
             <a:spLocks noGrp="1"/>
           </p:cNvSpPr>
@@ -26896,7 +28093,7 @@
       </p:sp>
       <p:sp>
         <p:nvSpPr>
-          <p:cNvPr id="193" name="PlaceHolder 2"/>
+          <p:cNvPr id="196" name="PlaceHolder 2"/>
           <p:cNvSpPr>
             <a:spLocks noGrp="1"/>
           </p:cNvSpPr>
@@ -26952,7 +28149,7 @@
       </p:sp>
       <p:sp>
         <p:nvSpPr>
-          <p:cNvPr id="194" name="PlaceHolder 3"/>
+          <p:cNvPr id="197" name="PlaceHolder 3"/>
           <p:cNvSpPr>
             <a:spLocks noGrp="1"/>
           </p:cNvSpPr>
@@ -27918,7 +29115,7 @@
       </p:sp>
       <p:pic>
         <p:nvPicPr>
-          <p:cNvPr id="195" name=""/>
+          <p:cNvPr id="198" name=""/>
           <p:cNvPicPr/>
           <p:nvPr/>
         </p:nvPicPr>
@@ -27942,7 +29139,7 @@
       </p:pic>
       <p:pic>
         <p:nvPicPr>
-          <p:cNvPr id="196" name=""/>
+          <p:cNvPr id="199" name=""/>
           <p:cNvPicPr/>
           <p:nvPr/>
         </p:nvPicPr>
@@ -27978,7 +29175,7 @@
         <p:txBody>
           <a:bodyPr/>
           <a:p>
-            <a:fld id="{A2BD1810-AA0C-4211-AFE1-BCAF7E951F83}" type="slidenum">
+            <a:fld id="{63D2F258-D2C2-4148-810D-F4FF8CB136F2}" type="slidenum">
               <a:t>9</a:t>
             </a:fld>
           </a:p>
